--- a/reports/BRANCH_FLORES_PERFORMANCE_SUMMARY_20260831_INARA.pptx
+++ b/reports/BRANCH_FLORES_PERFORMANCE_SUMMARY_20260831_INARA.pptx
@@ -12493,7 +12493,7 @@
                 </a:solidFill>
                 <a:latin typeface="Arial"/>
               </a:rPr>
-              <a:t>52</a:t>
+              <a:t>53</a:t>
             </a:r>
           </a:p>
         </p:txBody>
@@ -12524,11 +12524,11 @@
             <a:r>
               <a:rPr sz="1200" b="1" i="0">
                 <a:solidFill>
-                  <a:srgbClr val="D73527"/>
+                  <a:srgbClr val="687386"/>
                 </a:solidFill>
                 <a:latin typeface="Arial"/>
               </a:rPr>
-              <a:t>-18,8%</a:t>
+              <a:t>N/A</a:t>
             </a:r>
           </a:p>
         </p:txBody>
@@ -12563,7 +12563,7 @@
                 </a:solidFill>
                 <a:latin typeface="Arial"/>
               </a:rPr>
-              <a:t>MTD-1: 64   Δ -12</a:t>
+              <a:t>MTD-1: 0   Δ 53</a:t>
             </a:r>
           </a:p>
         </p:txBody>
@@ -12680,7 +12680,7 @@
                 </a:solidFill>
                 <a:latin typeface="Arial"/>
               </a:rPr>
-              <a:t>1.814</a:t>
+              <a:t>1.991</a:t>
             </a:r>
           </a:p>
         </p:txBody>
@@ -12711,11 +12711,11 @@
             <a:r>
               <a:rPr sz="1200" b="1" i="0">
                 <a:solidFill>
-                  <a:srgbClr val="D73527"/>
+                  <a:srgbClr val="687386"/>
                 </a:solidFill>
                 <a:latin typeface="Arial"/>
               </a:rPr>
-              <a:t>-18,9%</a:t>
+              <a:t>N/A</a:t>
             </a:r>
           </a:p>
         </p:txBody>
@@ -12750,7 +12750,7 @@
                 </a:solidFill>
                 <a:latin typeface="Arial"/>
               </a:rPr>
-              <a:t>MTD-1: 2.238   Δ -424</a:t>
+              <a:t>MTD-1: 0   Δ 1.991</a:t>
             </a:r>
           </a:p>
         </p:txBody>
@@ -13886,7 +13886,7 @@
                           </a:solidFill>
                           <a:latin typeface="Arial"/>
                         </a:rPr>
-                        <a:t>35</a:t>
+                        <a:t>0</a:t>
                       </a:r>
                     </a:p>
                   </a:txBody>
@@ -13933,7 +13933,7 @@
                           </a:solidFill>
                           <a:latin typeface="Arial"/>
                         </a:rPr>
-                        <a:t>35</a:t>
+                        <a:t>36</a:t>
                       </a:r>
                     </a:p>
                   </a:txBody>
@@ -13980,7 +13980,7 @@
                           </a:solidFill>
                           <a:latin typeface="Arial"/>
                         </a:rPr>
-                        <a:t>0,0%</a:t>
+                        <a:t>N/A</a:t>
                       </a:r>
                     </a:p>
                   </a:txBody>
@@ -14027,7 +14027,7 @@
                           </a:solidFill>
                           <a:latin typeface="Arial"/>
                         </a:rPr>
-                        <a:t>1.178</a:t>
+                        <a:t>0</a:t>
                       </a:r>
                     </a:p>
                   </a:txBody>
@@ -14074,7 +14074,7 @@
                           </a:solidFill>
                           <a:latin typeface="Arial"/>
                         </a:rPr>
-                        <a:t>1.201</a:t>
+                        <a:t>1.294</a:t>
                       </a:r>
                     </a:p>
                   </a:txBody>
@@ -14117,17 +14117,17 @@
                       <a:r>
                         <a:rPr sz="1050" b="0">
                           <a:solidFill>
-                            <a:srgbClr val="137D3F"/>
-                          </a:solidFill>
-                          <a:latin typeface="Arial"/>
-                        </a:rPr>
-                        <a:t>+2,0%</a:t>
-                      </a:r>
-                    </a:p>
-                  </a:txBody>
-                  <a:tcPr marL="27432" marR="27432" marT="0" marB="0">
-                    <a:solidFill>
-                      <a:srgbClr val="E5F4EA"/>
+                            <a:srgbClr val="687386"/>
+                          </a:solidFill>
+                          <a:latin typeface="Arial"/>
+                        </a:rPr>
+                        <a:t>N/A</a:t>
+                      </a:r>
+                    </a:p>
+                  </a:txBody>
+                  <a:tcPr marL="27432" marR="27432" marT="0" marB="0">
+                    <a:solidFill>
+                      <a:srgbClr val="E9EDF2"/>
                     </a:solidFill>
                     <a:lnL w="9000" cap="flat" cmpd="sng" algn="ctr">
                       <a:solidFill>
@@ -14546,7 +14546,7 @@
                           </a:solidFill>
                           <a:latin typeface="Arial"/>
                         </a:rPr>
-                        <a:t>29</a:t>
+                        <a:t>0</a:t>
                       </a:r>
                     </a:p>
                   </a:txBody>
@@ -14636,17 +14636,17 @@
                       <a:r>
                         <a:rPr sz="1050" b="0">
                           <a:solidFill>
-                            <a:srgbClr val="D73527"/>
-                          </a:solidFill>
-                          <a:latin typeface="Arial"/>
-                        </a:rPr>
-                        <a:t>-41,4%</a:t>
-                      </a:r>
-                    </a:p>
-                  </a:txBody>
-                  <a:tcPr marL="27432" marR="27432" marT="0" marB="0">
-                    <a:solidFill>
-                      <a:srgbClr val="FBE9E7"/>
+                            <a:srgbClr val="687386"/>
+                          </a:solidFill>
+                          <a:latin typeface="Arial"/>
+                        </a:rPr>
+                        <a:t>N/A</a:t>
+                      </a:r>
+                    </a:p>
+                  </a:txBody>
+                  <a:tcPr marL="27432" marR="27432" marT="0" marB="0">
+                    <a:solidFill>
+                      <a:srgbClr val="E9EDF2"/>
                     </a:solidFill>
                     <a:lnL w="9000" cap="flat" cmpd="sng" algn="ctr">
                       <a:solidFill>
@@ -14687,7 +14687,7 @@
                           </a:solidFill>
                           <a:latin typeface="Arial"/>
                         </a:rPr>
-                        <a:t>1.060</a:t>
+                        <a:t>0</a:t>
                       </a:r>
                     </a:p>
                   </a:txBody>
@@ -14734,7 +14734,7 @@
                           </a:solidFill>
                           <a:latin typeface="Arial"/>
                         </a:rPr>
-                        <a:t>613</a:t>
+                        <a:t>697</a:t>
                       </a:r>
                     </a:p>
                   </a:txBody>
@@ -14777,17 +14777,17 @@
                       <a:r>
                         <a:rPr sz="1050" b="0">
                           <a:solidFill>
-                            <a:srgbClr val="D73527"/>
-                          </a:solidFill>
-                          <a:latin typeface="Arial"/>
-                        </a:rPr>
-                        <a:t>-42,2%</a:t>
-                      </a:r>
-                    </a:p>
-                  </a:txBody>
-                  <a:tcPr marL="27432" marR="27432" marT="0" marB="0">
-                    <a:solidFill>
-                      <a:srgbClr val="FBE9E7"/>
+                            <a:srgbClr val="687386"/>
+                          </a:solidFill>
+                          <a:latin typeface="Arial"/>
+                        </a:rPr>
+                        <a:t>N/A</a:t>
+                      </a:r>
+                    </a:p>
+                  </a:txBody>
+                  <a:tcPr marL="27432" marR="27432" marT="0" marB="0">
+                    <a:solidFill>
+                      <a:srgbClr val="E9EDF2"/>
                     </a:solidFill>
                     <a:lnL w="9000" cap="flat" cmpd="sng" algn="ctr">
                       <a:solidFill>
@@ -22131,7 +22131,7 @@
                           </a:solidFill>
                           <a:latin typeface="Arial"/>
                         </a:rPr>
-                        <a:t>683</a:t>
+                        <a:t>713</a:t>
                       </a:r>
                     </a:p>
                   </a:txBody>
@@ -22225,7 +22225,7 @@
                           </a:solidFill>
                           <a:latin typeface="Arial"/>
                         </a:rPr>
-                        <a:t>3.540</a:t>
+                        <a:t>3.516</a:t>
                       </a:r>
                     </a:p>
                   </a:txBody>
@@ -22272,7 +22272,7 @@
                           </a:solidFill>
                           <a:latin typeface="Arial"/>
                         </a:rPr>
-                        <a:t>297</a:t>
+                        <a:t>296</a:t>
                       </a:r>
                     </a:p>
                   </a:txBody>
@@ -22319,7 +22319,7 @@
                           </a:solidFill>
                           <a:latin typeface="Arial"/>
                         </a:rPr>
-                        <a:t>248</a:t>
+                        <a:t>243</a:t>
                       </a:r>
                     </a:p>
                   </a:txBody>
@@ -22415,7 +22415,7 @@
                           </a:solidFill>
                           <a:latin typeface="Arial"/>
                         </a:rPr>
-                        <a:t>11,4%</a:t>
+                        <a:t>11,9%</a:t>
                       </a:r>
                     </a:p>
                   </a:txBody>
@@ -22509,7 +22509,7 @@
                           </a:solidFill>
                           <a:latin typeface="Arial"/>
                         </a:rPr>
-                        <a:t>58,9%</a:t>
+                        <a:t>58,5%</a:t>
                       </a:r>
                     </a:p>
                   </a:txBody>
@@ -22603,7 +22603,7 @@
                           </a:solidFill>
                           <a:latin typeface="Arial"/>
                         </a:rPr>
-                        <a:t>4,1%</a:t>
+                        <a:t>4,0%</a:t>
                       </a:r>
                     </a:p>
                   </a:txBody>
@@ -22836,7 +22836,7 @@
                 </a:solidFill>
                 <a:latin typeface="Arial"/>
               </a:rPr>
-              <a:t>Jumlah ODP  248</a:t>
+              <a:t>Jumlah ODP  243</a:t>
             </a:r>
           </a:p>
         </p:txBody>
@@ -22871,7 +22871,7 @@
                 </a:solidFill>
                 <a:latin typeface="Arial"/>
               </a:rPr>
-              <a:t>ODP dikunjungi  81 (32,7%)</a:t>
+              <a:t>ODP dikunjungi  87 (35,8%)</a:t>
             </a:r>
           </a:p>
         </p:txBody>
@@ -22941,7 +22941,7 @@
                 </a:solidFill>
                 <a:latin typeface="Arial"/>
               </a:rPr>
-              <a:t>124</a:t>
+              <a:t>135</a:t>
             </a:r>
           </a:p>
         </p:txBody>
@@ -23093,7 +23093,7 @@
                 </a:solidFill>
                 <a:latin typeface="Arial"/>
               </a:rPr>
-              <a:t>ODP dikunjungi  57 (70,4%)</a:t>
+              <a:t>ODP dikunjungi  66 (81,5%)</a:t>
             </a:r>
           </a:p>
         </p:txBody>
@@ -23163,7 +23163,7 @@
                 </a:solidFill>
                 <a:latin typeface="Arial"/>
               </a:rPr>
-              <a:t>104</a:t>
+              <a:t>113</a:t>
             </a:r>
           </a:p>
         </p:txBody>

--- a/reports/BRANCH_FLORES_PERFORMANCE_SUMMARY_20260831_INARA.pptx
+++ b/reports/BRANCH_FLORES_PERFORMANCE_SUMMARY_20260831_INARA.pptx
@@ -12524,11 +12524,11 @@
             <a:r>
               <a:rPr sz="1200" b="1" i="0">
                 <a:solidFill>
-                  <a:srgbClr val="687386"/>
+                  <a:srgbClr val="D73527"/>
                 </a:solidFill>
                 <a:latin typeface="Arial"/>
               </a:rPr>
-              <a:t>N/A</a:t>
+              <a:t>-25,4%</a:t>
             </a:r>
           </a:p>
         </p:txBody>
@@ -12563,7 +12563,7 @@
                 </a:solidFill>
                 <a:latin typeface="Arial"/>
               </a:rPr>
-              <a:t>MTD-1: 0   Δ 53</a:t>
+              <a:t>MTD-1: 71   Δ -18</a:t>
             </a:r>
           </a:p>
         </p:txBody>
@@ -12711,11 +12711,11 @@
             <a:r>
               <a:rPr sz="1200" b="1" i="0">
                 <a:solidFill>
-                  <a:srgbClr val="687386"/>
+                  <a:srgbClr val="D73527"/>
                 </a:solidFill>
                 <a:latin typeface="Arial"/>
               </a:rPr>
-              <a:t>N/A</a:t>
+              <a:t>-17,9%</a:t>
             </a:r>
           </a:p>
         </p:txBody>
@@ -12750,7 +12750,7 @@
                 </a:solidFill>
                 <a:latin typeface="Arial"/>
               </a:rPr>
-              <a:t>MTD-1: 0   Δ 1.991</a:t>
+              <a:t>MTD-1: 2.426   Δ -435</a:t>
             </a:r>
           </a:p>
         </p:txBody>
@@ -13886,7 +13886,7 @@
                           </a:solidFill>
                           <a:latin typeface="Arial"/>
                         </a:rPr>
-                        <a:t>0</a:t>
+                        <a:t>40</a:t>
                       </a:r>
                     </a:p>
                   </a:txBody>
@@ -13976,17 +13976,17 @@
                       <a:r>
                         <a:rPr sz="1050" b="0">
                           <a:solidFill>
-                            <a:srgbClr val="687386"/>
-                          </a:solidFill>
-                          <a:latin typeface="Arial"/>
-                        </a:rPr>
-                        <a:t>N/A</a:t>
-                      </a:r>
-                    </a:p>
-                  </a:txBody>
-                  <a:tcPr marL="27432" marR="27432" marT="0" marB="0">
-                    <a:solidFill>
-                      <a:srgbClr val="E9EDF2"/>
+                            <a:srgbClr val="D73527"/>
+                          </a:solidFill>
+                          <a:latin typeface="Arial"/>
+                        </a:rPr>
+                        <a:t>-10,0%</a:t>
+                      </a:r>
+                    </a:p>
+                  </a:txBody>
+                  <a:tcPr marL="27432" marR="27432" marT="0" marB="0">
+                    <a:solidFill>
+                      <a:srgbClr val="FBE9E7"/>
                     </a:solidFill>
                     <a:lnL w="9000" cap="flat" cmpd="sng" algn="ctr">
                       <a:solidFill>
@@ -14027,7 +14027,7 @@
                           </a:solidFill>
                           <a:latin typeface="Arial"/>
                         </a:rPr>
-                        <a:t>0</a:t>
+                        <a:t>1.284</a:t>
                       </a:r>
                     </a:p>
                   </a:txBody>
@@ -14117,17 +14117,17 @@
                       <a:r>
                         <a:rPr sz="1050" b="0">
                           <a:solidFill>
-                            <a:srgbClr val="687386"/>
-                          </a:solidFill>
-                          <a:latin typeface="Arial"/>
-                        </a:rPr>
-                        <a:t>N/A</a:t>
-                      </a:r>
-                    </a:p>
-                  </a:txBody>
-                  <a:tcPr marL="27432" marR="27432" marT="0" marB="0">
-                    <a:solidFill>
-                      <a:srgbClr val="E9EDF2"/>
+                            <a:srgbClr val="137D3F"/>
+                          </a:solidFill>
+                          <a:latin typeface="Arial"/>
+                        </a:rPr>
+                        <a:t>+0,8%</a:t>
+                      </a:r>
+                    </a:p>
+                  </a:txBody>
+                  <a:tcPr marL="27432" marR="27432" marT="0" marB="0">
+                    <a:solidFill>
+                      <a:srgbClr val="E5F4EA"/>
                     </a:solidFill>
                     <a:lnL w="9000" cap="flat" cmpd="sng" algn="ctr">
                       <a:solidFill>
@@ -14546,7 +14546,7 @@
                           </a:solidFill>
                           <a:latin typeface="Arial"/>
                         </a:rPr>
-                        <a:t>0</a:t>
+                        <a:t>31</a:t>
                       </a:r>
                     </a:p>
                   </a:txBody>
@@ -14636,17 +14636,17 @@
                       <a:r>
                         <a:rPr sz="1050" b="0">
                           <a:solidFill>
-                            <a:srgbClr val="687386"/>
-                          </a:solidFill>
-                          <a:latin typeface="Arial"/>
-                        </a:rPr>
-                        <a:t>N/A</a:t>
-                      </a:r>
-                    </a:p>
-                  </a:txBody>
-                  <a:tcPr marL="27432" marR="27432" marT="0" marB="0">
-                    <a:solidFill>
-                      <a:srgbClr val="E9EDF2"/>
+                            <a:srgbClr val="D73527"/>
+                          </a:solidFill>
+                          <a:latin typeface="Arial"/>
+                        </a:rPr>
+                        <a:t>-45,2%</a:t>
+                      </a:r>
+                    </a:p>
+                  </a:txBody>
+                  <a:tcPr marL="27432" marR="27432" marT="0" marB="0">
+                    <a:solidFill>
+                      <a:srgbClr val="FBE9E7"/>
                     </a:solidFill>
                     <a:lnL w="9000" cap="flat" cmpd="sng" algn="ctr">
                       <a:solidFill>
@@ -14687,7 +14687,7 @@
                           </a:solidFill>
                           <a:latin typeface="Arial"/>
                         </a:rPr>
-                        <a:t>0</a:t>
+                        <a:t>1.142</a:t>
                       </a:r>
                     </a:p>
                   </a:txBody>
@@ -14777,17 +14777,17 @@
                       <a:r>
                         <a:rPr sz="1050" b="0">
                           <a:solidFill>
-                            <a:srgbClr val="687386"/>
-                          </a:solidFill>
-                          <a:latin typeface="Arial"/>
-                        </a:rPr>
-                        <a:t>N/A</a:t>
-                      </a:r>
-                    </a:p>
-                  </a:txBody>
-                  <a:tcPr marL="27432" marR="27432" marT="0" marB="0">
-                    <a:solidFill>
-                      <a:srgbClr val="E9EDF2"/>
+                            <a:srgbClr val="D73527"/>
+                          </a:solidFill>
+                          <a:latin typeface="Arial"/>
+                        </a:rPr>
+                        <a:t>-39,0%</a:t>
+                      </a:r>
+                    </a:p>
+                  </a:txBody>
+                  <a:tcPr marL="27432" marR="27432" marT="0" marB="0">
+                    <a:solidFill>
+                      <a:srgbClr val="FBE9E7"/>
                     </a:solidFill>
                     <a:lnL w="9000" cap="flat" cmpd="sng" algn="ctr">
                       <a:solidFill>

--- a/reports/BRANCH_FLORES_PERFORMANCE_SUMMARY_20260831_INARA.pptx
+++ b/reports/BRANCH_FLORES_PERFORMANCE_SUMMARY_20260831_INARA.pptx
@@ -22873,7 +22873,7 @@
                 </a:solidFill>
                 <a:latin typeface="Arial"/>
               </a:rPr>
-              <a:t>ODP dikunjungi  87 (35,8%)</a:t>
+              <a:t>ODP dikunjungi  98 (40,3%)</a:t>
             </a:r>
           </a:p>
         </p:txBody>
@@ -22943,7 +22943,7 @@
                 </a:solidFill>
                 <a:latin typeface="Arial"/>
               </a:rPr>
-              <a:t>135</a:t>
+              <a:t>324</a:t>
             </a:r>
           </a:p>
         </p:txBody>
@@ -23095,7 +23095,7 @@
                 </a:solidFill>
                 <a:latin typeface="Arial"/>
               </a:rPr>
-              <a:t>ODP dikunjungi  66 (81,5%)</a:t>
+              <a:t>ODP dikunjungi  67 (82,7%)</a:t>
             </a:r>
           </a:p>
         </p:txBody>
@@ -23165,7 +23165,7 @@
                 </a:solidFill>
                 <a:latin typeface="Arial"/>
               </a:rPr>
-              <a:t>113</a:t>
+              <a:t>264</a:t>
             </a:r>
           </a:p>
         </p:txBody>
